--- a/artifacts/step_by_step/comments/bench01/demo/bench01_comments_slides_심플_피드백반영.pptx
+++ b/artifacts/step_by_step/comments/bench01/demo/bench01_comments_slides_심플_피드백반영.pptx
@@ -20,7 +20,6 @@
     <p:sldId id="266" r:id="rId19"/>
     <p:sldId id="264" r:id="rId15"/>
     <p:sldId id="267" r:id="rId20"/>
-    <p:sldId id="268" r:id="rId21"/>
   </p:sldIdLst>
   <p:sldSz cy="6858000" cx="12191675"/>
   <p:notesSz cx="6858000" cy="9144000"/>
@@ -907,16 +906,6 @@
           <a:p/>
           <a:p>
             <a:r>
-              <a:t>(예상 질문) 512토큰으로 학습하지 않았나요? → 512는 문서 주제 심화 실험에서 쓴 값입니다. 댓글은 가장 긴 것이 69토큰이라 128로 학습했습니다. 512로 늘려도 4,000자 글은 약 1,700토큰이라 다 읽지 못하고, 섞인 글을 못 가리는 문제(맨 앞에 둬도 7%)는 남습니다.</a:t>
-            </a:r>
-          </a:p>
-          <a:p>
-            <a:r>
-              <a:t>(예상 질문) 4,000자는 어디서 왔나요? → 처음 코드(복습 키트)의 MAX_INPUT_CHARS 값을 .env에 그대로 둔 것입니다. 넘으면 서버가 422로 거절합니다. 데이터 길이를 보고 정한 값이 아닙니다.</a:t>
-            </a:r>
-          </a:p>
-          <a:p>
-            <a:r>
               <a:t>(참고) 평범한 글은 짧은 댓글을 이어 붙여 만든 것이라 진짜 긴 댓글과 다를 수 있습니다. 결과: artifacts/step_by_step/comments/bench01/service_checks/long_comment01</a:t>
             </a:r>
           </a:p>
@@ -989,64 +978,6 @@
 </file>
 
 <file path=ppt/notesSlides/notesSlide12.xml><?xml version="1.0" encoding="utf-8"?>
-<p:notes xmlns:a="http://schemas.openxmlformats.org/drawingml/2006/main" xmlns:p="http://schemas.openxmlformats.org/presentationml/2006/main" xmlns:r="http://schemas.openxmlformats.org/officeDocument/2006/relationships">
-  <p:cSld>
-    <p:spTree>
-      <p:nvGrpSpPr>
-        <p:cNvPr id="1" name=""/>
-        <p:cNvGrpSpPr/>
-        <p:nvPr/>
-      </p:nvGrpSpPr>
-      <p:grpSpPr>
-        <a:xfrm>
-          <a:off x="0" y="0"/>
-          <a:ext cx="0" cy="0"/>
-          <a:chOff x="0" y="0"/>
-          <a:chExt cx="0" cy="0"/>
-        </a:xfrm>
-      </p:grpSpPr>
-      <p:sp>
-        <p:nvSpPr>
-          <p:cNvPr id="2" name="Slide Image Placeholder 1"/>
-          <p:cNvSpPr>
-            <a:spLocks noGrp="1"/>
-          </p:cNvSpPr>
-          <p:nvPr>
-            <p:ph type="sldImg" idx="2"/>
-          </p:nvPr>
-        </p:nvSpPr>
-        <p:spPr/>
-      </p:sp>
-      <p:sp>
-        <p:nvSpPr>
-          <p:cNvPr id="3" name="Notes Placeholder 2"/>
-          <p:cNvSpPr>
-            <a:spLocks noGrp="1"/>
-          </p:cNvSpPr>
-          <p:nvPr>
-            <p:ph type="body" idx="1"/>
-          </p:nvPr>
-        </p:nvSpPr>
-        <p:spPr/>
-        <p:txBody>
-          <a:bodyPr/>
-          <a:lstStyle/>
-          <a:p>
-            <a:r>
-              <a:t>(질의응답용 부록. 발표 시간에는 넣지 않습니다.)</a:t>
-            </a:r>
-          </a:p>
-        </p:txBody>
-      </p:sp>
-    </p:spTree>
-  </p:cSld>
-  <p:clrMapOvr>
-    <a:masterClrMapping/>
-  </p:clrMapOvr>
-</p:notes>
-</file>
-
-<file path=ppt/notesSlides/notesSlide13.xml><?xml version="1.0" encoding="utf-8"?>
 <p:notes xmlns:a="http://schemas.openxmlformats.org/drawingml/2006/main" xmlns:p="http://schemas.openxmlformats.org/presentationml/2006/main" xmlns:r="http://schemas.openxmlformats.org/officeDocument/2006/relationships">
   <p:cSld>
     <p:spTree>
@@ -1288,13 +1219,7 @@
           <a:lstStyle/>
           <a:p>
             <a:r>
-              <a:t>(20초) 데이터는 사람이 라벨을 붙인 연예 뉴스 댓글 8,367건입니다. 모델 입력은 댓글 원문이고, 정답은 사람이 붙인 라벨입니다. 원본 dev를 확인해 보니 471건 중 469건이 train과 같은 기사의 댓글이어서, 기사 단위로 다시 나눴습니다. 같은 기준 모델로 비교하면 0.569가 0.553으로 내려갑니다. 댓글은 가장 길어도 137자입니다.</a:t>
-            </a:r>
-          </a:p>
-          <a:p/>
-          <a:p>
-            <a:r>
-              <a:t>(예상 질문) 0.553은 분할 방식만 비교하려고 train과 validation을 5번 다시 나눠 잰 평균입니다. 실제로 모델을 고른 분할의 기준 모델 validation 점수(다음 장의 0.529)와는 다른 값입니다.</a:t>
+              <a:t>(20초) 데이터는 사람이 라벨을 붙인 연예 뉴스 댓글 8,367건입니다. 모델 입력은 댓글 원문이고, 정답은 사람이 붙인 라벨입니다. 원본 dev를 확인해 보니 471건 중 469건이 train과 같은 기사의 댓글이었습니다. 같은 기사 댓글이 학습과 평가에 섞이면 점수가 부풀려질 수 있어서, 한 기사의 댓글은 한 분할에만 들어가게 다시 나눴습니다. 댓글은 가장 길어도 137자입니다.</a:t>
             </a:r>
           </a:p>
         </p:txBody>
@@ -1434,13 +1359,19 @@
           <a:lstStyle/>
           <a:p>
             <a:r>
-              <a:t>(25초) 분류 모델은 기준 모델인 TF-IDF와 로지스틱 회귀를 포함해 10개를 같은 분할에서 비교했습니다. 댓글로 사전학습한 KcELECTRA가 가장 좋았고, 크기가 훨씬 큰 RoBERTa-large보다도 나았습니다. 고른 뒤 test로 한 번만 평가해 Macro F1 0.667(정확도 0.671), 기준 모델은 0.540이었습니다. 가장 많이 틀린 것은 offensive로, 294건 중 84건을 문제 없음으로 봐서 고치지 않고 게시됩니다. (그래프 값은 모델마다 가장 좋은 설정의 validation 점수이고, 시드가 여럿이면 평균입니다.)</a:t>
+              <a:t>(25초) 분류 모델은 기준 모델인 TF-IDF와 로지스틱 회귀를 포함해 10개를 같은 분할에서 비교했습니다. 댓글로 사전학습한 KcELECTRA가 가장 좋았고, 크기가 훨씬 큰 RoBERTa-large보다도 나았습니다. 고른 뒤 test로 한 번만 평가해 Macro F1 0.666(정확도 0.671), 기준 모델은 0.540이었습니다. 가장 많이 틀린 것은 offensive로, 294건 중 84건을 문제 없음으로 봐서 고치지 않고 게시됩니다.</a:t>
             </a:r>
           </a:p>
           <a:p/>
           <a:p>
             <a:r>
-              <a:t>(예상 질문) 기준 모델 점수가 0.529, 0.553, 0.540으로 다른 이유 → 셋 다 TF-IDF + 로지스틱 회귀지만 잰 데이터가 다릅니다. 0.529는 이 그래프의 validation 840건, 0.553은 데이터 장에서 분할 방식만 비교하려고 train과 validation을 5번 다시 나눠 잰 평균(기사 단위), 0.540은 test 838건에서 한 번 잰 점수입니다. 그래프의 LinearSVC 0.540은 기준 모델의 test 점수와 우연히 같은 값입니다.</a:t>
+              <a:t>(그래프) 모델마다 학습률 두 가지 중 validation 점수가 높은 설정을 그렸고, 시드를 3개 돌린 설정은 평균입니다. 그래서 KLUE BERT-base는 5e-5 설정의 0.656입니다(README 표의 0.650은 2e-5 설정의 시드 3개 평균).</a:t>
+            </a:r>
+          </a:p>
+          <a:p/>
+          <a:p>
+            <a:r>
+              <a:t>(예상 질문) 기준 모델 점수가 0.529와 0.540으로 다른 이유 → 같은 TF-IDF + 로지스틱 회귀지만, 0.529는 이 그래프의 validation 840건, 0.540은 test 838건에서 한 번 잰 점수입니다. 그래프의 LinearSVC 0.540은 기준 모델의 test 점수와 우연히 같은 값입니다.</a:t>
             </a:r>
           </a:p>
         </p:txBody>
@@ -1586,7 +1517,7 @@
           <a:p/>
           <a:p>
             <a:r>
-              <a:t>(예상 질문) 보고서의 2.37점은 무엇인가요? → 형식 강제 없이 쓰던 원래 설정의 qwen3:4b(3.97점)와 비교한 값입니다(6.33 - 3.97). 그래프의 3.90점은 qwen3:4b에도 형식 강제를 더한 점수라, 같은 조건으로 비교하면 2.43점입니다.</a:t>
+              <a:t>(예상 질문) 보고서의 2.37점은 무엇인가요? → 형식 강제 없이 쓰던 원래 설정의 qwen3:4b와 비교한 값입니다(반올림 전 6.333 − 3.967 = 2.367). 그래프의 3.90점은 qwen3:4b에도 형식 강제를 더한 점수라, 같은 조건으로 비교하면 2.43점(6.333 − 3.900)입니다.</a:t>
             </a:r>
           </a:p>
         </p:txBody>
@@ -1866,13 +1797,7 @@
           <a:lstStyle/>
           <a:p>
             <a:r>
-              <a:t>(25초) 처음에는 뜻이 바뀐 답을 놓친 것이 가장 큰 문제라고 봤는데, 원인별로 세어 보니 놓친 나쁜 답 대부분은 분류 모델이 악플을 문제 없음으로 고른 경우였습니다. 그래서 확신도가 낮은 '문제 없음' 판정과, 뜻이 바뀐 답을 사람 검토로 보내는 검사를 더했습니다. 나쁜 답을 게시 전에 잡는 수가 20개 중 7개에서 16개로 늘었고, 대신 사람 검토와 처리 시간이 늘었습니다. 뜻 검사는 1개만 더 잡아서 효과가 작습니다.</a:t>
-            </a:r>
-          </a:p>
-          <a:p/>
-          <a:p>
-            <a:r>
-              <a:t>(예상 질문) 뜻 검사는 왜 생성 모델(gemma4)과 다른 qwen3로 하나요? → 다시 검사는 원문을 분류한 KcELECTRA를 그대로 씁니다. 뜻 검사는 원문과 고친 댓글 두 문장을 비교해야 해서 생성형 판정 모델을 씁니다. gemma4:e4b도 후보에 넣어 11개를 개발 답 159개로 비교했고 qwen3가 1위였습니다(0.23, gemma4:e4b 0.13). 다만 모든 후보의 95% 구간이 0을 포함해 차이는 확실하지 않고, 고를 때 GPU 메모리를 기준에 넣지 않았습니다. gemma4로 판정하면 모델을 하나만 올려도 됩니다(부록 B).</a:t>
+              <a:t>(25초) 처음에는 뜻이 바뀐 답을 놓친 것이 가장 큰 문제라고 봤는데, 원인별로 세어 보니 놓친 나쁜 답 대부분은 분류 모델이 악플을 문제 없음으로 고른 경우였습니다. 그래서 확신도가 낮은 '문제 없음' 판정과, 뜻이 바뀐 답을 사람 검토로 보내는 검사를 더했습니다. 나쁜 답을 게시 전에 잡는 수가 20개 중 7개에서 16개로 늘었고, 대신 사람 검토가 답 96개 중 12개(12.5%)에서 32개(33%)로 늘고 처리 시간도 늘었습니다. 뜻 검사는 1개만 더 잡아서 효과가 작습니다.</a:t>
             </a:r>
           </a:p>
         </p:txBody>
@@ -2011,20 +1936,9 @@
           </a:bodyPr>
           <a:lstStyle/>
           <a:p>
-            <a:pPr indent="0" lvl="0" marL="0" rtl="0" algn="l">
-              <a:spcBef>
-                <a:spcPts val="0"/>
-              </a:spcBef>
-              <a:spcAft>
-                <a:spcPts val="0"/>
-              </a:spcAft>
-              <a:buNone/>
-            </a:pPr>
-            <a:r>
-              <a:rPr lang="en-US"/>
-              <a:t>(영상 약 70초) 영상으로 보여 드리겠습니다. 4분 안에 여유 있게 끝내려면 영상을 70초 안으로 편집합니다(대량 검수 처리를 기다리는 구간을 빠르게 돌리거나 잘라 냄). 영상은 demo_scenario.md 순서대로 찍습니다.</a:t>
-            </a:r>
-            <a:endParaRPr/>
+            <a:r>
+              <a:t>(영상 약 70초) 영상으로 보여 드리겠습니다. 영상은 demo_scenario.md 순서대로 찍고, 대량 검수 처리를 기다리는 구간은 빠르게 돌리거나 잘라 냅니다.</a:t>
+            </a:r>
           </a:p>
         </p:txBody>
       </p:sp>
@@ -12236,7 +12150,7 @@
         </p:nvGraphicFramePr>
         <p:xfrm>
           <a:off x="548640" y="1554480"/>
-          <a:ext cx="11091672" cy="3438144"/>
+          <a:ext cx="11091672" cy="3529584"/>
         </p:xfrm>
         <a:graphic>
           <a:graphicData uri="http://schemas.openxmlformats.org/drawingml/2006/table">
@@ -12250,7 +12164,7 @@
                 <a:gridCol w="5166360"/>
                 <a:gridCol w="4325112"/>
               </a:tblGrid>
-              <a:tr h="420624">
+              <a:tr h="402336">
                 <a:tc>
                   <a:txBody>
                     <a:bodyPr/>
@@ -12402,7 +12316,7 @@
                   </a:tcPr>
                 </a:tc>
               </a:tr>
-              <a:tr h="603504">
+              <a:tr h="585216">
                 <a:tc>
                   <a:txBody>
                     <a:bodyPr/>
@@ -12530,7 +12444,7 @@
                           <a:cs typeface="Noto Sans KR"/>
                           <a:sym typeface="Noto Sans KR"/>
                         </a:rPr>
-                        <a:t xml:space="preserve"> (기준 모델 0.569 → 0.553)</a:t>
+                        <a:t xml:space="preserve"> (한 기사의 댓글은 한 분할에만)</a:t>
                       </a:r>
                       <a:endParaRPr/>
                     </a:p>
@@ -12548,7 +12462,7 @@
                   </a:tcPr>
                 </a:tc>
               </a:tr>
-              <a:tr h="603504">
+              <a:tr h="585216">
                 <a:tc>
                   <a:txBody>
                     <a:bodyPr/>
@@ -12717,7 +12631,7 @@
                   </a:tcPr>
                 </a:tc>
               </a:tr>
-              <a:tr h="603504">
+              <a:tr h="585216">
                 <a:tc>
                   <a:txBody>
                     <a:bodyPr/>
@@ -12886,7 +12800,7 @@
                   </a:tcPr>
                 </a:tc>
               </a:tr>
-              <a:tr h="603504">
+              <a:tr h="786384">
                 <a:tc>
                   <a:txBody>
                     <a:bodyPr/>
@@ -12958,7 +12872,7 @@
                           <a:cs typeface="Noto Sans KR"/>
                           <a:sym typeface="Noto Sans KR"/>
                         </a:rPr>
-                        <a:t>none 지침에 넣은 '맞춤법까지 고치지 않고'가 오히려 원문을 고치게</a:t>
+                        <a:t>none 지침에 넣은 '띄어쓰기와 맞춤법까지 고치지 않고'가 오히려</a:t>
                       </a:r>
                       <a:br>
                         <a:rPr b="0" lang="en-US" sz="1300" u="none" cap="none" strike="noStrike">
@@ -12981,7 +12895,7 @@
                           <a:cs typeface="Noto Sans KR"/>
                           <a:sym typeface="Noto Sans KR"/>
                         </a:rPr>
-                        <a:t>했습니다</a:t>
+                        <a:t>원문을 고치게 했습니다(로컬 답의 원문 그대로 100% → 40%)</a:t>
                       </a:r>
                       <a:endParaRPr/>
                     </a:p>
@@ -13043,7 +12957,7 @@
                   </a:tcPr>
                 </a:tc>
               </a:tr>
-              <a:tr h="603504">
+              <a:tr h="585216">
                 <a:tc>
                   <a:txBody>
                     <a:bodyPr/>
@@ -14116,7 +14030,7 @@
                 <a:cs typeface="Noto Sans KR"/>
                 <a:sym typeface="Noto Sans KR"/>
               </a:rPr>
-              <a:t>뜻 검사 프롬프트 비교, 생성 모델로 판정해</a:t>
+              <a:t>뜻 검사 프롬프트 비교, 효과가 작으면 빼서</a:t>
             </a:r>
             <a:br>
               <a:rPr b="0" i="0" lang="en-US" sz="1400" u="none" cap="none" strike="noStrike">
@@ -14139,7 +14053,7 @@
                 <a:cs typeface="Noto Sans KR"/>
                 <a:sym typeface="Noto Sans KR"/>
               </a:rPr>
-              <a:t>GPU 줄이기</a:t>
+              <a:t>GPU 부담 줄이기</a:t>
             </a:r>
             <a:endParaRPr/>
           </a:p>
@@ -14819,7 +14733,7 @@
                 <a:cs typeface="Noto Sans KR"/>
                 <a:sym typeface="Noto Sans KR"/>
               </a:rPr>
-              <a:t xml:space="preserve">  라벨별 지침대로 처리했나</a:t>
+              <a:t xml:space="preserve">  라벨별 지침과 지시대로 처리했나</a:t>
             </a:r>
             <a:endParaRPr/>
           </a:p>
@@ -14863,7 +14777,7 @@
                 <a:cs typeface="Noto Sans KR"/>
                 <a:sym typeface="Noto Sans KR"/>
               </a:rPr>
-              <a:t xml:space="preserve">  욕설·혐오가 없고, 의견을 남기거나</a:t>
+              <a:t xml:space="preserve">  라벨마다 정한 꼭 할 것을</a:t>
             </a:r>
             <a:br>
               <a:rPr b="0" i="0" lang="en-US" sz="1400" u="none" cap="none" strike="noStrike">
@@ -14886,7 +14800,53 @@
                 <a:cs typeface="Noto Sans KR"/>
                 <a:sym typeface="Noto Sans KR"/>
               </a:rPr>
-              <a:t>게시 불가를 알렸나</a:t>
+              <a:t>지켰나(none 원문 그대로, offensive 욕설</a:t>
+            </a:r>
+            <a:br>
+              <a:rPr b="0" i="0" lang="en-US" sz="1400" u="none" cap="none" strike="noStrike">
+                <a:solidFill>
+                  <a:srgbClr val="000000"/>
+                </a:solidFill>
+                <a:latin typeface="Noto Sans KR"/>
+                <a:ea typeface="Noto Sans KR"/>
+                <a:cs typeface="Noto Sans KR"/>
+                <a:sym typeface="Noto Sans KR"/>
+              </a:rPr>
+            </a:br>
+            <a:r>
+              <a:rPr b="0" i="0" lang="en-US" sz="1400" u="none" cap="none" strike="noStrike">
+                <a:solidFill>
+                  <a:srgbClr val="000000"/>
+                </a:solidFill>
+                <a:latin typeface="Noto Sans KR"/>
+                <a:ea typeface="Noto Sans KR"/>
+                <a:cs typeface="Noto Sans KR"/>
+                <a:sym typeface="Noto Sans KR"/>
+              </a:rPr>
+              <a:t>없이 의견 유지, hate 혐오 없이 의견만</a:t>
+            </a:r>
+            <a:br>
+              <a:rPr b="0" i="0" lang="en-US" sz="1400" u="none" cap="none" strike="noStrike">
+                <a:solidFill>
+                  <a:srgbClr val="000000"/>
+                </a:solidFill>
+                <a:latin typeface="Noto Sans KR"/>
+                <a:ea typeface="Noto Sans KR"/>
+                <a:cs typeface="Noto Sans KR"/>
+                <a:sym typeface="Noto Sans KR"/>
+              </a:rPr>
+            </a:br>
+            <a:r>
+              <a:rPr b="0" i="0" lang="en-US" sz="1400" u="none" cap="none" strike="noStrike">
+                <a:solidFill>
+                  <a:srgbClr val="000000"/>
+                </a:solidFill>
+                <a:latin typeface="Noto Sans KR"/>
+                <a:ea typeface="Noto Sans KR"/>
+                <a:cs typeface="Noto Sans KR"/>
+                <a:sym typeface="Noto Sans KR"/>
+              </a:rPr>
+              <a:t>남기거나 게시 불가 안내)</a:t>
             </a:r>
             <a:endParaRPr/>
           </a:p>
@@ -14953,7 +14913,7 @@
                 <a:cs typeface="Noto Sans KR"/>
                 <a:sym typeface="Noto Sans KR"/>
               </a:rPr>
-              <a:t>뜻을 바꾸지 않았나</a:t>
+              <a:t>대상·평가를 바꾸지 않았나</a:t>
             </a:r>
             <a:endParaRPr/>
           </a:p>
@@ -15130,778 +15090,7 @@
                 <a:cs typeface="Noto Sans KR"/>
                 <a:sym typeface="Noto Sans KR"/>
               </a:rPr>
-              <a:t>→ 형식을 지켰는지(쓸 수 있는 답 비율)와 내용 점수를 나눠 기록했습니다</a:t>
-            </a:r>
-            <a:endParaRPr/>
-          </a:p>
-        </p:txBody>
-      </p:sp>
-    </p:spTree>
-  </p:cSld>
-  <p:clrMapOvr>
-    <a:masterClrMapping/>
-  </p:clrMapOvr>
-</p:sld>
-</file>
-
-<file path=ppt/slides/slide13.xml><?xml version="1.0" encoding="utf-8"?>
-<p:sld xmlns:a="http://schemas.openxmlformats.org/drawingml/2006/main" xmlns:r="http://schemas.openxmlformats.org/officeDocument/2006/relationships" xmlns:mc="http://schemas.openxmlformats.org/markup-compatibility/2006" xmlns:mv="urn:schemas-microsoft-com:mac:vml" xmlns:p="http://schemas.openxmlformats.org/presentationml/2006/main" xmlns:c="http://schemas.openxmlformats.org/drawingml/2006/chart" xmlns:dgm="http://schemas.openxmlformats.org/drawingml/2006/diagram" xmlns:o="urn:schemas-microsoft-com:office:office" xmlns:v="urn:schemas-microsoft-com:vml" xmlns:pvml="urn:schemas-microsoft-com:office:powerpoint" xmlns:com="http://schemas.openxmlformats.org/drawingml/2006/compatibility" xmlns:p14="http://schemas.microsoft.com/office/powerpoint/2010/main" xmlns:p15="http://schemas.microsoft.com/office/powerpoint/2012/main" xmlns:ahyp="http://schemas.microsoft.com/office/drawing/2018/hyperlinkcolor">
-  <p:cSld>
-    <p:spTree>
-      <p:nvGrpSpPr>
-        <p:cNvPr id="170" name="Shape 170"/>
-        <p:cNvGrpSpPr/>
-        <p:nvPr/>
-      </p:nvGrpSpPr>
-      <p:grpSpPr>
-        <a:xfrm>
-          <a:off x="0" y="0"/>
-          <a:ext cx="0" cy="0"/>
-          <a:chOff x="0" y="0"/>
-          <a:chExt cx="0" cy="0"/>
-        </a:xfrm>
-      </p:grpSpPr>
-      <p:sp>
-        <p:nvSpPr>
-          <p:cNvPr id="171" name="Google Shape;171;p21"/>
-          <p:cNvSpPr txBox="1"/>
-          <p:nvPr/>
-        </p:nvSpPr>
-        <p:spPr>
-          <a:xfrm>
-            <a:off x="548640" y="347472"/>
-            <a:ext cx="11094415" cy="310896"/>
-          </a:xfrm>
-          <a:prstGeom prst="rect">
-            <a:avLst/>
-          </a:prstGeom>
-          <a:noFill/>
-          <a:ln>
-            <a:noFill/>
-          </a:ln>
-        </p:spPr>
-        <p:txBody>
-          <a:bodyPr anchorCtr="0" anchor="t" bIns="27425" lIns="45700" spcFirstLastPara="1" rIns="45700" wrap="square" tIns="27425">
-            <a:noAutofit/>
-          </a:bodyPr>
-          <a:lstStyle/>
-          <a:p>
-            <a:pPr indent="0" lvl="0" marL="0" marR="0" rtl="0" algn="l">
-              <a:lnSpc>
-                <a:spcPct val="112000"/>
-              </a:lnSpc>
-              <a:spcBef>
-                <a:spcPts val="0"/>
-              </a:spcBef>
-              <a:spcAft>
-                <a:spcPts val="0"/>
-              </a:spcAft>
-              <a:buNone/>
-            </a:pPr>
-            <a:r>
-              <a:rPr b="1" i="0" lang="en-US" sz="1300" u="none" cap="none" strike="noStrike">
-                <a:solidFill>
-                  <a:srgbClr val="000000"/>
-                </a:solidFill>
-                <a:latin typeface="Noto Sans KR"/>
-                <a:ea typeface="Noto Sans KR"/>
-                <a:cs typeface="Noto Sans KR"/>
-                <a:sym typeface="Noto Sans KR"/>
-              </a:rPr>
-              <a:t>부록 B</a:t>
-            </a:r>
-            <a:endParaRPr/>
-          </a:p>
-        </p:txBody>
-      </p:sp>
-      <p:sp>
-        <p:nvSpPr>
-          <p:cNvPr id="172" name="Google Shape;172;p21"/>
-          <p:cNvSpPr txBox="1"/>
-          <p:nvPr/>
-        </p:nvSpPr>
-        <p:spPr>
-          <a:xfrm>
-            <a:off x="548640" y="640080"/>
-            <a:ext cx="11094415" cy="685800"/>
-          </a:xfrm>
-          <a:prstGeom prst="rect">
-            <a:avLst/>
-          </a:prstGeom>
-          <a:noFill/>
-          <a:ln>
-            <a:noFill/>
-          </a:ln>
-        </p:spPr>
-        <p:txBody>
-          <a:bodyPr anchorCtr="0" anchor="t" bIns="27425" lIns="45700" spcFirstLastPara="1" rIns="45700" wrap="square" tIns="27425">
-            <a:noAutofit/>
-          </a:bodyPr>
-          <a:lstStyle/>
-          <a:p>
-            <a:pPr indent="0" lvl="0" marL="0" marR="0" rtl="0" algn="l">
-              <a:lnSpc>
-                <a:spcPct val="112000"/>
-              </a:lnSpc>
-              <a:spcBef>
-                <a:spcPts val="0"/>
-              </a:spcBef>
-              <a:spcAft>
-                <a:spcPts val="0"/>
-              </a:spcAft>
-              <a:buNone/>
-            </a:pPr>
-            <a:r>
-              <a:rPr b="1" i="0" lang="en-US" sz="2800" u="none" cap="none" strike="noStrike">
-                <a:solidFill>
-                  <a:srgbClr val="000000"/>
-                </a:solidFill>
-                <a:latin typeface="Noto Sans KR"/>
-                <a:ea typeface="Noto Sans KR"/>
-                <a:cs typeface="Noto Sans KR"/>
-                <a:sym typeface="Noto Sans KR"/>
-              </a:rPr>
-              <a:t>예상 질문</a:t>
-            </a:r>
-            <a:endParaRPr/>
-          </a:p>
-        </p:txBody>
-      </p:sp>
-      <p:sp>
-        <p:nvSpPr>
-          <p:cNvPr id="173" name="Google Shape;173;p21"/>
-          <p:cNvSpPr txBox="1"/>
-          <p:nvPr/>
-        </p:nvSpPr>
-        <p:spPr>
-          <a:xfrm>
-            <a:off x="548640" y="6419088"/>
-            <a:ext cx="7315200" cy="274320"/>
-          </a:xfrm>
-          <a:prstGeom prst="rect">
-            <a:avLst/>
-          </a:prstGeom>
-          <a:noFill/>
-          <a:ln>
-            <a:noFill/>
-          </a:ln>
-        </p:spPr>
-        <p:txBody>
-          <a:bodyPr anchorCtr="0" anchor="t" bIns="27425" lIns="45700" spcFirstLastPara="1" rIns="45700" wrap="square" tIns="27425">
-            <a:noAutofit/>
-          </a:bodyPr>
-          <a:lstStyle/>
-          <a:p>
-            <a:pPr indent="0" lvl="0" marL="0" marR="0" rtl="0" algn="l">
-              <a:lnSpc>
-                <a:spcPct val="112000"/>
-              </a:lnSpc>
-              <a:spcBef>
-                <a:spcPts val="0"/>
-              </a:spcBef>
-              <a:spcAft>
-                <a:spcPts val="0"/>
-              </a:spcAft>
-              <a:buNone/>
-            </a:pPr>
-            <a:r>
-              <a:rPr b="0" i="0" lang="en-US" sz="1000" u="none" cap="none" strike="noStrike">
-                <a:solidFill>
-                  <a:srgbClr val="000000"/>
-                </a:solidFill>
-                <a:latin typeface="Noto Sans KR"/>
-                <a:ea typeface="Noto Sans KR"/>
-                <a:cs typeface="Noto Sans KR"/>
-                <a:sym typeface="Noto Sans KR"/>
-              </a:rPr>
-              <a:t>bench01 · 자유주제: 악성댓글 분류 + 순화</a:t>
-            </a:r>
-            <a:endParaRPr/>
-          </a:p>
-        </p:txBody>
-      </p:sp>
-      <p:sp>
-        <p:nvSpPr>
-          <p:cNvPr id="174" name="Google Shape;174;p21"/>
-          <p:cNvSpPr/>
-          <p:nvPr/>
-        </p:nvSpPr>
-        <p:spPr>
-          <a:xfrm>
-            <a:off x="548640" y="1508760"/>
-            <a:ext cx="6583680" cy="4023360"/>
-          </a:xfrm>
-          <a:prstGeom prst="rect">
-            <a:avLst/>
-          </a:prstGeom>
-          <a:noFill/>
-          <a:ln w="9525">
-            <a:solidFill>
-              <a:srgbClr val="000000"/>
-            </a:solidFill>
-          </a:ln>
-        </p:spPr>
-        <p:txBody>
-          <a:bodyPr anchorCtr="0" anchor="t" bIns="146300" lIns="201150" spcFirstLastPara="1" rIns="201150" wrap="square" tIns="146300">
-            <a:noAutofit/>
-          </a:bodyPr>
-          <a:lstStyle/>
-          <a:p>
-            <a:pPr indent="0" lvl="0" marL="0" marR="0" rtl="0" algn="l">
-              <a:lnSpc>
-                <a:spcPct val="112000"/>
-              </a:lnSpc>
-              <a:spcBef>
-                <a:spcPts val="0"/>
-              </a:spcBef>
-              <a:spcAft>
-                <a:spcPts val="0"/>
-              </a:spcAft>
-              <a:buNone/>
-            </a:pPr>
-            <a:r>
-              <a:rPr b="1" i="0" lang="en-US" sz="1700" u="none" cap="none" strike="noStrike">
-                <a:solidFill>
-                  <a:srgbClr val="000000"/>
-                </a:solidFill>
-                <a:latin typeface="Noto Sans KR"/>
-                <a:ea typeface="Noto Sans KR"/>
-                <a:cs typeface="Noto Sans KR"/>
-                <a:sym typeface="Noto Sans KR"/>
-              </a:rPr>
-              <a:t>뜻 검사는 왜 생성 모델과 다른 qwen3인가요?</a:t>
-            </a:r>
-            <a:endParaRPr/>
-          </a:p>
-          <a:p>
-            <a:pPr indent="-219456" lvl="0" marL="219456" marR="0" rtl="0" algn="l">
-              <a:lnSpc>
-                <a:spcPct val="112000"/>
-              </a:lnSpc>
-              <a:spcBef>
-                <a:spcPts val="900"/>
-              </a:spcBef>
-              <a:spcAft>
-                <a:spcPts val="0"/>
-              </a:spcAft>
-              <a:buClr>
-                <a:srgbClr val="000000"/>
-              </a:buClr>
-              <a:buSzPts val="1500"/>
-              <a:buFont typeface="Arial"/>
-              <a:buChar char="•"/>
-            </a:pPr>
-            <a:r>
-              <a:rPr b="0" i="0" lang="en-US" sz="1400" u="none" cap="none" strike="noStrike">
-                <a:solidFill>
-                  <a:srgbClr val="000000"/>
-                </a:solidFill>
-                <a:latin typeface="Noto Sans KR"/>
-                <a:ea typeface="Noto Sans KR"/>
-                <a:cs typeface="Noto Sans KR"/>
-                <a:sym typeface="Noto Sans KR"/>
-              </a:rPr>
-              <a:t>다시 검사는 원문을 분류한 KcELECTRA를 그대로 씁니다. 뜻 검사는 두</a:t>
-            </a:r>
-            <a:br>
-              <a:rPr b="0" i="0" lang="en-US" sz="1400" u="none" cap="none" strike="noStrike">
-                <a:solidFill>
-                  <a:srgbClr val="000000"/>
-                </a:solidFill>
-                <a:latin typeface="Noto Sans KR"/>
-                <a:ea typeface="Noto Sans KR"/>
-                <a:cs typeface="Noto Sans KR"/>
-                <a:sym typeface="Noto Sans KR"/>
-              </a:rPr>
-            </a:br>
-            <a:r>
-              <a:rPr b="0" i="0" lang="en-US" sz="1400" u="none" cap="none" strike="noStrike">
-                <a:solidFill>
-                  <a:srgbClr val="000000"/>
-                </a:solidFill>
-                <a:latin typeface="Noto Sans KR"/>
-                <a:ea typeface="Noto Sans KR"/>
-                <a:cs typeface="Noto Sans KR"/>
-                <a:sym typeface="Noto Sans KR"/>
-              </a:rPr>
-              <a:t>문장을 비교해야 해서 생성형 판정 모델을 씁니다.</a:t>
-            </a:r>
-            <a:endParaRPr/>
-          </a:p>
-          <a:p>
-            <a:pPr indent="-219456" lvl="0" marL="219456" marR="0" rtl="0" algn="l">
-              <a:lnSpc>
-                <a:spcPct val="112000"/>
-              </a:lnSpc>
-              <a:spcBef>
-                <a:spcPts val="900"/>
-              </a:spcBef>
-              <a:spcAft>
-                <a:spcPts val="0"/>
-              </a:spcAft>
-              <a:buClr>
-                <a:srgbClr val="000000"/>
-              </a:buClr>
-              <a:buSzPts val="1500"/>
-              <a:buFont typeface="Arial"/>
-              <a:buChar char="•"/>
-            </a:pPr>
-            <a:r>
-              <a:rPr b="0" i="0" lang="en-US" sz="1400" u="none" cap="none" strike="noStrike">
-                <a:solidFill>
-                  <a:srgbClr val="000000"/>
-                </a:solidFill>
-                <a:latin typeface="Noto Sans KR"/>
-                <a:ea typeface="Noto Sans KR"/>
-                <a:cs typeface="Noto Sans KR"/>
-                <a:sym typeface="Noto Sans KR"/>
-              </a:rPr>
-              <a:t>생성 모델 gemma4:e4b도 후보에 넣어 11개를 개발 답 159개로 비교했고,</a:t>
-            </a:r>
-            <a:br>
-              <a:rPr b="0" i="0" lang="en-US" sz="1400" u="none" cap="none" strike="noStrike">
-                <a:solidFill>
-                  <a:srgbClr val="000000"/>
-                </a:solidFill>
-                <a:latin typeface="Noto Sans KR"/>
-                <a:ea typeface="Noto Sans KR"/>
-                <a:cs typeface="Noto Sans KR"/>
-                <a:sym typeface="Noto Sans KR"/>
-              </a:rPr>
-            </a:br>
-            <a:r>
-              <a:rPr b="0" i="0" lang="en-US" sz="1400" u="none" cap="none" strike="noStrike">
-                <a:solidFill>
-                  <a:srgbClr val="000000"/>
-                </a:solidFill>
-                <a:latin typeface="Noto Sans KR"/>
-                <a:ea typeface="Noto Sans KR"/>
-                <a:cs typeface="Noto Sans KR"/>
-                <a:sym typeface="Noto Sans KR"/>
-              </a:rPr>
-              <a:t>qwen3가 1위였습니다(0.23, gemma4:e4b 0.13).</a:t>
-            </a:r>
-            <a:endParaRPr/>
-          </a:p>
-          <a:p>
-            <a:pPr indent="-219456" lvl="0" marL="219456" marR="0" rtl="0" algn="l">
-              <a:lnSpc>
-                <a:spcPct val="112000"/>
-              </a:lnSpc>
-              <a:spcBef>
-                <a:spcPts val="900"/>
-              </a:spcBef>
-              <a:spcAft>
-                <a:spcPts val="0"/>
-              </a:spcAft>
-              <a:buClr>
-                <a:srgbClr val="000000"/>
-              </a:buClr>
-              <a:buSzPts val="1500"/>
-              <a:buFont typeface="Arial"/>
-              <a:buChar char="•"/>
-            </a:pPr>
-            <a:r>
-              <a:rPr b="0" i="0" lang="en-US" sz="1400" u="none" cap="none" strike="noStrike">
-                <a:solidFill>
-                  <a:srgbClr val="000000"/>
-                </a:solidFill>
-                <a:latin typeface="Noto Sans KR"/>
-                <a:ea typeface="Noto Sans KR"/>
-                <a:cs typeface="Noto Sans KR"/>
-                <a:sym typeface="Noto Sans KR"/>
-              </a:rPr>
-              <a:t>다만 모든 후보의 95% 구간이 0을 포함해 차이는 확실하지 않고, 고르는</a:t>
-            </a:r>
-            <a:br>
-              <a:rPr b="0" i="0" lang="en-US" sz="1400" u="none" cap="none" strike="noStrike">
-                <a:solidFill>
-                  <a:srgbClr val="000000"/>
-                </a:solidFill>
-                <a:latin typeface="Noto Sans KR"/>
-                <a:ea typeface="Noto Sans KR"/>
-                <a:cs typeface="Noto Sans KR"/>
-                <a:sym typeface="Noto Sans KR"/>
-              </a:rPr>
-            </a:br>
-            <a:r>
-              <a:rPr b="0" i="0" lang="en-US" sz="1400" u="none" cap="none" strike="noStrike">
-                <a:solidFill>
-                  <a:srgbClr val="000000"/>
-                </a:solidFill>
-                <a:latin typeface="Noto Sans KR"/>
-                <a:ea typeface="Noto Sans KR"/>
-                <a:cs typeface="Noto Sans KR"/>
-                <a:sym typeface="Noto Sans KR"/>
-              </a:rPr>
-              <a:t>기준에 GPU 메모리를 넣지 않았습니다(qwen3를 더 올려 GPU</a:t>
-            </a:r>
-            <a:br>
-              <a:rPr b="0" i="0" lang="en-US" sz="1400" u="none" cap="none" strike="noStrike">
-                <a:solidFill>
-                  <a:srgbClr val="000000"/>
-                </a:solidFill>
-                <a:latin typeface="Noto Sans KR"/>
-                <a:ea typeface="Noto Sans KR"/>
-                <a:cs typeface="Noto Sans KR"/>
-                <a:sym typeface="Noto Sans KR"/>
-              </a:rPr>
-            </a:br>
-            <a:r>
-              <a:rPr b="0" i="0" lang="en-US" sz="1400" u="none" cap="none" strike="noStrike">
-                <a:solidFill>
-                  <a:srgbClr val="000000"/>
-                </a:solidFill>
-                <a:latin typeface="Noto Sans KR"/>
-                <a:ea typeface="Noto Sans KR"/>
-                <a:cs typeface="Noto Sans KR"/>
-                <a:sym typeface="Noto Sans KR"/>
-              </a:rPr>
-              <a:t>5.1 → 7.7GB).</a:t>
-            </a:r>
-            <a:endParaRPr/>
-          </a:p>
-        </p:txBody>
-      </p:sp>
-      <p:sp>
-        <p:nvSpPr>
-          <p:cNvPr id="175" name="Google Shape;175;p21"/>
-          <p:cNvSpPr/>
-          <p:nvPr/>
-        </p:nvSpPr>
-        <p:spPr>
-          <a:xfrm>
-            <a:off x="7360920" y="1508760"/>
-            <a:ext cx="4282135" cy="4023360"/>
-          </a:xfrm>
-          <a:prstGeom prst="rect">
-            <a:avLst/>
-          </a:prstGeom>
-          <a:noFill/>
-          <a:ln w="9525">
-            <a:solidFill>
-              <a:srgbClr val="000000"/>
-            </a:solidFill>
-          </a:ln>
-        </p:spPr>
-        <p:txBody>
-          <a:bodyPr anchorCtr="0" anchor="t" bIns="146300" lIns="201150" spcFirstLastPara="1" rIns="201150" wrap="square" tIns="146300">
-            <a:noAutofit/>
-          </a:bodyPr>
-          <a:lstStyle/>
-          <a:p>
-            <a:pPr indent="0" lvl="0" marL="0" marR="0" rtl="0" algn="l">
-              <a:lnSpc>
-                <a:spcPct val="112000"/>
-              </a:lnSpc>
-              <a:spcBef>
-                <a:spcPts val="0"/>
-              </a:spcBef>
-              <a:spcAft>
-                <a:spcPts val="0"/>
-              </a:spcAft>
-              <a:buNone/>
-            </a:pPr>
-            <a:r>
-              <a:rPr b="1" i="0" lang="en-US" sz="1700" u="none" cap="none" strike="noStrike">
-                <a:solidFill>
-                  <a:srgbClr val="000000"/>
-                </a:solidFill>
-                <a:latin typeface="Noto Sans KR"/>
-                <a:ea typeface="Noto Sans KR"/>
-                <a:cs typeface="Noto Sans KR"/>
-                <a:sym typeface="Noto Sans KR"/>
-              </a:rPr>
-              <a:t>4,000자, 128토큰은 어디서?</a:t>
-            </a:r>
-            <a:endParaRPr/>
-          </a:p>
-          <a:p>
-            <a:pPr indent="-219456" lvl="0" marL="219456" marR="0" rtl="0" algn="l">
-              <a:lnSpc>
-                <a:spcPct val="112000"/>
-              </a:lnSpc>
-              <a:spcBef>
-                <a:spcPts val="900"/>
-              </a:spcBef>
-              <a:spcAft>
-                <a:spcPts val="0"/>
-              </a:spcAft>
-              <a:buClr>
-                <a:srgbClr val="000000"/>
-              </a:buClr>
-              <a:buSzPts val="1500"/>
-              <a:buFont typeface="Arial"/>
-              <a:buChar char="•"/>
-            </a:pPr>
-            <a:r>
-              <a:rPr b="0" i="0" lang="en-US" sz="1400" u="none" cap="none" strike="noStrike">
-                <a:solidFill>
-                  <a:srgbClr val="000000"/>
-                </a:solidFill>
-                <a:latin typeface="Noto Sans KR"/>
-                <a:ea typeface="Noto Sans KR"/>
-                <a:cs typeface="Noto Sans KR"/>
-                <a:sym typeface="Noto Sans KR"/>
-              </a:rPr>
-              <a:t>4,000자: 처음 코드의</a:t>
-            </a:r>
-            <a:br>
-              <a:rPr b="0" i="0" lang="en-US" sz="1400" u="none" cap="none" strike="noStrike">
-                <a:solidFill>
-                  <a:srgbClr val="000000"/>
-                </a:solidFill>
-                <a:latin typeface="Noto Sans KR"/>
-                <a:ea typeface="Noto Sans KR"/>
-                <a:cs typeface="Noto Sans KR"/>
-                <a:sym typeface="Noto Sans KR"/>
-              </a:rPr>
-            </a:br>
-            <a:r>
-              <a:rPr b="0" i="0" lang="en-US" sz="1400" u="none" cap="none" strike="noStrike">
-                <a:solidFill>
-                  <a:srgbClr val="000000"/>
-                </a:solidFill>
-                <a:latin typeface="Noto Sans KR"/>
-                <a:ea typeface="Noto Sans KR"/>
-                <a:cs typeface="Noto Sans KR"/>
-                <a:sym typeface="Noto Sans KR"/>
-              </a:rPr>
-              <a:t>MAX_INPUT_CHARS(.env). 넘으면 422로</a:t>
-            </a:r>
-            <a:br>
-              <a:rPr b="0" i="0" lang="en-US" sz="1400" u="none" cap="none" strike="noStrike">
-                <a:solidFill>
-                  <a:srgbClr val="000000"/>
-                </a:solidFill>
-                <a:latin typeface="Noto Sans KR"/>
-                <a:ea typeface="Noto Sans KR"/>
-                <a:cs typeface="Noto Sans KR"/>
-                <a:sym typeface="Noto Sans KR"/>
-              </a:rPr>
-            </a:br>
-            <a:r>
-              <a:rPr b="0" i="0" lang="en-US" sz="1400" u="none" cap="none" strike="noStrike">
-                <a:solidFill>
-                  <a:srgbClr val="000000"/>
-                </a:solidFill>
-                <a:latin typeface="Noto Sans KR"/>
-                <a:ea typeface="Noto Sans KR"/>
-                <a:cs typeface="Noto Sans KR"/>
-                <a:sym typeface="Noto Sans KR"/>
-              </a:rPr>
-              <a:t>거절합니다. 데이터 길이로 정한 값이 아닙니다.</a:t>
-            </a:r>
-            <a:endParaRPr/>
-          </a:p>
-          <a:p>
-            <a:pPr indent="-219456" lvl="0" marL="219456" marR="0" rtl="0" algn="l">
-              <a:lnSpc>
-                <a:spcPct val="112000"/>
-              </a:lnSpc>
-              <a:spcBef>
-                <a:spcPts val="900"/>
-              </a:spcBef>
-              <a:spcAft>
-                <a:spcPts val="0"/>
-              </a:spcAft>
-              <a:buClr>
-                <a:srgbClr val="000000"/>
-              </a:buClr>
-              <a:buSzPts val="1500"/>
-              <a:buFont typeface="Arial"/>
-              <a:buChar char="•"/>
-            </a:pPr>
-            <a:r>
-              <a:rPr b="0" i="0" lang="en-US" sz="1400" u="none" cap="none" strike="noStrike">
-                <a:solidFill>
-                  <a:srgbClr val="000000"/>
-                </a:solidFill>
-                <a:latin typeface="Noto Sans KR"/>
-                <a:ea typeface="Noto Sans KR"/>
-                <a:cs typeface="Noto Sans KR"/>
-                <a:sym typeface="Noto Sans KR"/>
-              </a:rPr>
-              <a:t>128토큰: 댓글 분류 후보 22개를 모두 이 길이로</a:t>
-            </a:r>
-            <a:br>
-              <a:rPr b="0" i="0" lang="en-US" sz="1400" u="none" cap="none" strike="noStrike">
-                <a:solidFill>
-                  <a:srgbClr val="000000"/>
-                </a:solidFill>
-                <a:latin typeface="Noto Sans KR"/>
-                <a:ea typeface="Noto Sans KR"/>
-                <a:cs typeface="Noto Sans KR"/>
-                <a:sym typeface="Noto Sans KR"/>
-              </a:rPr>
-            </a:br>
-            <a:r>
-              <a:rPr b="0" i="0" lang="en-US" sz="1400" u="none" cap="none" strike="noStrike">
-                <a:solidFill>
-                  <a:srgbClr val="000000"/>
-                </a:solidFill>
-                <a:latin typeface="Noto Sans KR"/>
-                <a:ea typeface="Noto Sans KR"/>
-                <a:cs typeface="Noto Sans KR"/>
-                <a:sym typeface="Noto Sans KR"/>
-              </a:rPr>
-              <a:t>학습했습니다. 512는 문서 주제 심화 실험의</a:t>
-            </a:r>
-            <a:br>
-              <a:rPr b="0" i="0" lang="en-US" sz="1400" u="none" cap="none" strike="noStrike">
-                <a:solidFill>
-                  <a:srgbClr val="000000"/>
-                </a:solidFill>
-                <a:latin typeface="Noto Sans KR"/>
-                <a:ea typeface="Noto Sans KR"/>
-                <a:cs typeface="Noto Sans KR"/>
-                <a:sym typeface="Noto Sans KR"/>
-              </a:rPr>
-            </a:br>
-            <a:r>
-              <a:rPr b="0" i="0" lang="en-US" sz="1400" u="none" cap="none" strike="noStrike">
-                <a:solidFill>
-                  <a:srgbClr val="000000"/>
-                </a:solidFill>
-                <a:latin typeface="Noto Sans KR"/>
-                <a:ea typeface="Noto Sans KR"/>
-                <a:cs typeface="Noto Sans KR"/>
-                <a:sym typeface="Noto Sans KR"/>
-              </a:rPr>
-              <a:t>값입니다.</a:t>
-            </a:r>
-            <a:endParaRPr/>
-          </a:p>
-          <a:p>
-            <a:pPr indent="-219456" lvl="0" marL="219456" marR="0" rtl="0" algn="l">
-              <a:lnSpc>
-                <a:spcPct val="112000"/>
-              </a:lnSpc>
-              <a:spcBef>
-                <a:spcPts val="900"/>
-              </a:spcBef>
-              <a:spcAft>
-                <a:spcPts val="0"/>
-              </a:spcAft>
-              <a:buClr>
-                <a:srgbClr val="000000"/>
-              </a:buClr>
-              <a:buSzPts val="1500"/>
-              <a:buFont typeface="Arial"/>
-              <a:buChar char="•"/>
-            </a:pPr>
-            <a:r>
-              <a:rPr b="0" i="0" lang="en-US" sz="1400" u="none" cap="none" strike="noStrike">
-                <a:solidFill>
-                  <a:srgbClr val="000000"/>
-                </a:solidFill>
-                <a:latin typeface="Noto Sans KR"/>
-                <a:ea typeface="Noto Sans KR"/>
-                <a:cs typeface="Noto Sans KR"/>
-                <a:sym typeface="Noto Sans KR"/>
-              </a:rPr>
-              <a:t>512로 늘려도 4,000자 글(약 1,700토큰)은</a:t>
-            </a:r>
-            <a:br>
-              <a:rPr b="0" i="0" lang="en-US" sz="1400" u="none" cap="none" strike="noStrike">
-                <a:solidFill>
-                  <a:srgbClr val="000000"/>
-                </a:solidFill>
-                <a:latin typeface="Noto Sans KR"/>
-                <a:ea typeface="Noto Sans KR"/>
-                <a:cs typeface="Noto Sans KR"/>
-                <a:sym typeface="Noto Sans KR"/>
-              </a:rPr>
-            </a:br>
-            <a:r>
-              <a:rPr b="0" i="0" lang="en-US" sz="1400" u="none" cap="none" strike="noStrike">
-                <a:solidFill>
-                  <a:srgbClr val="000000"/>
-                </a:solidFill>
-                <a:latin typeface="Noto Sans KR"/>
-                <a:ea typeface="Noto Sans KR"/>
-                <a:cs typeface="Noto Sans KR"/>
-                <a:sym typeface="Noto Sans KR"/>
-              </a:rPr>
-              <a:t>다 못 읽고, 섞인 글 문제(맨 앞에 둬도 7%)는</a:t>
-            </a:r>
-            <a:br>
-              <a:rPr b="0" i="0" lang="en-US" sz="1400" u="none" cap="none" strike="noStrike">
-                <a:solidFill>
-                  <a:srgbClr val="000000"/>
-                </a:solidFill>
-                <a:latin typeface="Noto Sans KR"/>
-                <a:ea typeface="Noto Sans KR"/>
-                <a:cs typeface="Noto Sans KR"/>
-                <a:sym typeface="Noto Sans KR"/>
-              </a:rPr>
-            </a:br>
-            <a:r>
-              <a:rPr b="0" i="0" lang="en-US" sz="1400" u="none" cap="none" strike="noStrike">
-                <a:solidFill>
-                  <a:srgbClr val="000000"/>
-                </a:solidFill>
-                <a:latin typeface="Noto Sans KR"/>
-                <a:ea typeface="Noto Sans KR"/>
-                <a:cs typeface="Noto Sans KR"/>
-                <a:sym typeface="Noto Sans KR"/>
-              </a:rPr>
-              <a:t>남습니다.</a:t>
-            </a:r>
-            <a:endParaRPr/>
-          </a:p>
-        </p:txBody>
-      </p:sp>
-      <p:sp>
-        <p:nvSpPr>
-          <p:cNvPr id="176" name="Google Shape;176;p21"/>
-          <p:cNvSpPr/>
-          <p:nvPr/>
-        </p:nvSpPr>
-        <p:spPr>
-          <a:xfrm>
-            <a:off x="548640" y="5742432"/>
-            <a:ext cx="11094415" cy="530352"/>
-          </a:xfrm>
-          <a:prstGeom prst="rect">
-            <a:avLst/>
-          </a:prstGeom>
-          <a:noFill/>
-          <a:ln w="9525">
-            <a:solidFill>
-              <a:srgbClr val="000000"/>
-            </a:solidFill>
-          </a:ln>
-        </p:spPr>
-        <p:txBody>
-          <a:bodyPr anchorCtr="0" anchor="ctr" bIns="45700" lIns="228600" spcFirstLastPara="1" rIns="228600" wrap="square" tIns="45700">
-            <a:noAutofit/>
-          </a:bodyPr>
-          <a:lstStyle/>
-          <a:p>
-            <a:pPr indent="0" lvl="0" marL="0" marR="0" rtl="0" algn="l">
-              <a:lnSpc>
-                <a:spcPct val="112000"/>
-              </a:lnSpc>
-              <a:spcBef>
-                <a:spcPts val="0"/>
-              </a:spcBef>
-              <a:spcAft>
-                <a:spcPts val="0"/>
-              </a:spcAft>
-              <a:buNone/>
-            </a:pPr>
-            <a:r>
-              <a:rPr b="1" i="0" lang="en-US" sz="1500" u="none" cap="none" strike="noStrike">
-                <a:solidFill>
-                  <a:srgbClr val="000000"/>
-                </a:solidFill>
-                <a:latin typeface="Noto Sans KR"/>
-                <a:ea typeface="Noto Sans KR"/>
-                <a:cs typeface="Noto Sans KR"/>
-                <a:sym typeface="Noto Sans KR"/>
-              </a:rPr>
-              <a:t>→ 근거: bench01의 comparisons/review_rules01, service_checks/long_comment01</a:t>
+              <a:t>→ 형식을 지킨 답의 비율은 따로 적고, 형식을 어긴 답은 내용 점수 0점으로 셌습니다</a:t>
             </a:r>
             <a:endParaRPr/>
           </a:p>
@@ -18534,7 +17723,7 @@
                 <a:cs typeface="Noto Sans KR"/>
                 <a:sym typeface="Noto Sans KR"/>
               </a:rPr>
-              <a:t>중앙값 30자, 가장 긴 것 137자</a:t>
+              <a:t>중앙값 31자, 가장 긴 것 137자</a:t>
             </a:r>
             <a:endParaRPr/>
           </a:p>
@@ -18599,7 +17788,7 @@
         <p:spPr>
           <a:xfrm>
             <a:off x="7680960" y="1600200"/>
-            <a:ext cx="3962095" cy="3520440"/>
+            <a:ext cx="3962095" cy="3108960"/>
           </a:xfrm>
           <a:prstGeom prst="rect">
             <a:avLst/>
@@ -18666,7 +17855,7 @@
                 <a:cs typeface="Noto Sans KR"/>
                 <a:sym typeface="Noto Sans KR"/>
               </a:rPr>
-              <a:t>확인해 보니 원본 dev 471건 중 469건이</a:t>
+              <a:t>원본 dev 471건 가운데 train과 같은</a:t>
             </a:r>
             <a:br>
               <a:rPr b="0" i="0" lang="en-US" sz="1500" u="none" cap="none" strike="noStrike">
@@ -18689,53 +17878,7 @@
                 <a:cs typeface="Noto Sans KR"/>
                 <a:sym typeface="Noto Sans KR"/>
               </a:rPr>
-              <a:t>train과 같은 기사의 댓글이었습니다. 같은</a:t>
-            </a:r>
-            <a:br>
-              <a:rPr b="0" i="0" lang="en-US" sz="1500" u="none" cap="none" strike="noStrike">
-                <a:solidFill>
-                  <a:srgbClr val="000000"/>
-                </a:solidFill>
-                <a:latin typeface="Noto Sans KR"/>
-                <a:ea typeface="Noto Sans KR"/>
-                <a:cs typeface="Noto Sans KR"/>
-                <a:sym typeface="Noto Sans KR"/>
-              </a:rPr>
-            </a:br>
-            <a:r>
-              <a:rPr b="0" i="0" lang="en-US" sz="1500" u="none" cap="none" strike="noStrike">
-                <a:solidFill>
-                  <a:srgbClr val="000000"/>
-                </a:solidFill>
-                <a:latin typeface="Noto Sans KR"/>
-                <a:ea typeface="Noto Sans KR"/>
-                <a:cs typeface="Noto Sans KR"/>
-                <a:sym typeface="Noto Sans KR"/>
-              </a:rPr>
-              <a:t>기사 댓글은 내용이 비슷해 점수가</a:t>
-            </a:r>
-            <a:br>
-              <a:rPr b="0" i="0" lang="en-US" sz="1500" u="none" cap="none" strike="noStrike">
-                <a:solidFill>
-                  <a:srgbClr val="000000"/>
-                </a:solidFill>
-                <a:latin typeface="Noto Sans KR"/>
-                <a:ea typeface="Noto Sans KR"/>
-                <a:cs typeface="Noto Sans KR"/>
-                <a:sym typeface="Noto Sans KR"/>
-              </a:rPr>
-            </a:br>
-            <a:r>
-              <a:rPr b="0" i="0" lang="en-US" sz="1500" u="none" cap="none" strike="noStrike">
-                <a:solidFill>
-                  <a:srgbClr val="000000"/>
-                </a:solidFill>
-                <a:latin typeface="Noto Sans KR"/>
-                <a:ea typeface="Noto Sans KR"/>
-                <a:cs typeface="Noto Sans KR"/>
-                <a:sym typeface="Noto Sans KR"/>
-              </a:rPr>
-              <a:t>부풀려집니다.</a:t>
+              <a:t>기사에 달린 댓글</a:t>
             </a:r>
             <a:endParaRPr/>
           </a:p>
@@ -18745,7 +17888,7 @@
                 <a:spcPct val="112000"/>
               </a:lnSpc>
               <a:spcBef>
-                <a:spcPts val="1200"/>
+                <a:spcPts val="400"/>
               </a:spcBef>
               <a:spcAft>
                 <a:spcPts val="0"/>
@@ -18753,39 +17896,28 @@
               <a:buNone/>
             </a:pPr>
             <a:r>
-              <a:rPr b="0" i="0" lang="en-US" sz="1300" u="none" cap="none" strike="noStrike">
-                <a:solidFill>
-                  <a:srgbClr val="000000"/>
-                </a:solidFill>
-                <a:latin typeface="Noto Sans KR"/>
-                <a:ea typeface="Noto Sans KR"/>
-                <a:cs typeface="Noto Sans KR"/>
-                <a:sym typeface="Noto Sans KR"/>
-              </a:rPr>
-              <a:t>기준 모델로 5번씩 나눠 본</a:t>
-            </a:r>
-            <a:br>
-              <a:rPr b="0" i="0" lang="en-US" sz="1300" u="none" cap="none" strike="noStrike">
-                <a:solidFill>
-                  <a:schemeClr val="lt1"/>
-                </a:solidFill>
-                <a:latin typeface="Calibri"/>
-                <a:ea typeface="Calibri"/>
-                <a:cs typeface="Calibri"/>
-                <a:sym typeface="Calibri"/>
-              </a:rPr>
-            </a:br>
-            <a:r>
-              <a:rPr b="0" i="0" lang="en-US" sz="1300" u="none" cap="none" strike="noStrike">
-                <a:solidFill>
-                  <a:srgbClr val="000000"/>
-                </a:solidFill>
-                <a:latin typeface="Noto Sans KR"/>
-                <a:ea typeface="Noto Sans KR"/>
-                <a:cs typeface="Noto Sans KR"/>
-                <a:sym typeface="Noto Sans KR"/>
-              </a:rPr>
-              <a:t>validation Macro F1 평균</a:t>
+              <a:rPr b="1" i="0" lang="en-US" sz="2200" u="none" cap="none" strike="noStrike">
+                <a:solidFill>
+                  <a:srgbClr val="3451D1"/>
+                </a:solidFill>
+                <a:latin typeface="Noto Sans KR"/>
+                <a:ea typeface="Noto Sans KR"/>
+                <a:cs typeface="Noto Sans KR"/>
+                <a:sym typeface="Noto Sans KR"/>
+              </a:rPr>
+              <a:t>469건</a:t>
+            </a:r>
+            <a:r>
+              <a:rPr b="1" i="0" lang="en-US" sz="1500" u="none" cap="none" strike="noStrike">
+                <a:solidFill>
+                  <a:srgbClr val="3451D1"/>
+                </a:solidFill>
+                <a:latin typeface="Noto Sans KR"/>
+                <a:ea typeface="Noto Sans KR"/>
+                <a:cs typeface="Noto Sans KR"/>
+                <a:sym typeface="Noto Sans KR"/>
+              </a:rPr>
+              <a:t xml:space="preserve">  (99.6%)</a:t>
             </a:r>
             <a:endParaRPr/>
           </a:p>
@@ -18795,7 +17927,7 @@
                 <a:spcPct val="112000"/>
               </a:lnSpc>
               <a:spcBef>
-                <a:spcPts val="400"/>
+                <a:spcPts val="1200"/>
               </a:spcBef>
               <a:spcAft>
                 <a:spcPts val="0"/>
@@ -18812,58 +17944,53 @@
                 <a:cs typeface="Noto Sans KR"/>
                 <a:sym typeface="Noto Sans KR"/>
               </a:rPr>
-              <a:t>댓글 단위로 나누면  </a:t>
-            </a:r>
-            <a:r>
-              <a:rPr b="1" i="0" lang="en-US" sz="2200" u="none" cap="none" strike="noStrike">
-                <a:solidFill>
-                  <a:srgbClr val="000000"/>
-                </a:solidFill>
-                <a:latin typeface="Noto Sans KR"/>
-                <a:ea typeface="Noto Sans KR"/>
-                <a:cs typeface="Noto Sans KR"/>
-                <a:sym typeface="Noto Sans KR"/>
-              </a:rPr>
-              <a:t>0.569</a:t>
-            </a:r>
-            <a:endParaRPr/>
-          </a:p>
-          <a:p>
-            <a:pPr indent="0" lvl="0" marL="0" marR="0" rtl="0" algn="l">
-              <a:lnSpc>
-                <a:spcPct val="112000"/>
-              </a:lnSpc>
-              <a:spcBef>
-                <a:spcPts val="200"/>
-              </a:spcBef>
-              <a:spcAft>
-                <a:spcPts val="0"/>
-              </a:spcAft>
-              <a:buNone/>
-            </a:pPr>
-            <a:r>
-              <a:rPr b="1" i="0" lang="en-US" sz="1500" u="none" cap="none" strike="noStrike">
-                <a:solidFill>
-                  <a:srgbClr val="3451D1"/>
-                </a:solidFill>
-                <a:latin typeface="Noto Sans KR"/>
-                <a:ea typeface="Noto Sans KR"/>
-                <a:cs typeface="Noto Sans KR"/>
-                <a:sym typeface="Noto Sans KR"/>
-              </a:rPr>
-              <a:t>기사 단위로 나누면  </a:t>
-            </a:r>
-            <a:r>
-              <a:rPr b="1" i="0" lang="en-US" sz="2200" u="none" cap="none" strike="noStrike">
-                <a:solidFill>
-                  <a:srgbClr val="3451D1"/>
-                </a:solidFill>
-                <a:latin typeface="Noto Sans KR"/>
-                <a:ea typeface="Noto Sans KR"/>
-                <a:cs typeface="Noto Sans KR"/>
-                <a:sym typeface="Noto Sans KR"/>
-              </a:rPr>
-              <a:t>0.553</a:t>
+              <a:t>같은 기사의 댓글이 학습과 평가에 섞이면</a:t>
+            </a:r>
+            <a:br>
+              <a:rPr b="0" i="0" lang="en-US" sz="1500" u="none" cap="none" strike="noStrike">
+                <a:solidFill>
+                  <a:srgbClr val="000000"/>
+                </a:solidFill>
+                <a:latin typeface="Noto Sans KR"/>
+                <a:ea typeface="Noto Sans KR"/>
+                <a:cs typeface="Noto Sans KR"/>
+                <a:sym typeface="Noto Sans KR"/>
+              </a:rPr>
+            </a:br>
+            <a:r>
+              <a:rPr b="0" i="0" lang="en-US" sz="1500" u="none" cap="none" strike="noStrike">
+                <a:solidFill>
+                  <a:srgbClr val="000000"/>
+                </a:solidFill>
+                <a:latin typeface="Noto Sans KR"/>
+                <a:ea typeface="Noto Sans KR"/>
+                <a:cs typeface="Noto Sans KR"/>
+                <a:sym typeface="Noto Sans KR"/>
+              </a:rPr>
+              <a:t>점수가 부풀려질 수 있어, 기사 단위로 다시</a:t>
+            </a:r>
+            <a:br>
+              <a:rPr b="0" i="0" lang="en-US" sz="1500" u="none" cap="none" strike="noStrike">
+                <a:solidFill>
+                  <a:srgbClr val="000000"/>
+                </a:solidFill>
+                <a:latin typeface="Noto Sans KR"/>
+                <a:ea typeface="Noto Sans KR"/>
+                <a:cs typeface="Noto Sans KR"/>
+                <a:sym typeface="Noto Sans KR"/>
+              </a:rPr>
+            </a:br>
+            <a:r>
+              <a:rPr b="0" i="0" lang="en-US" sz="1500" u="none" cap="none" strike="noStrike">
+                <a:solidFill>
+                  <a:srgbClr val="000000"/>
+                </a:solidFill>
+                <a:latin typeface="Noto Sans KR"/>
+                <a:ea typeface="Noto Sans KR"/>
+                <a:cs typeface="Noto Sans KR"/>
+                <a:sym typeface="Noto Sans KR"/>
+              </a:rPr>
+              <a:t>나눴습니다.</a:t>
             </a:r>
             <a:endParaRPr/>
           </a:p>
@@ -19223,7 +18350,7 @@
                 <a:cs typeface="Noto Sans KR"/>
                 <a:sym typeface="Noto Sans KR"/>
               </a:rPr>
-              <a:t>0.667</a:t>
+              <a:t>0.666</a:t>
             </a:r>
             <a:r>
               <a:rPr b="1" i="0" lang="en-US" sz="1500" u="none" cap="none" strike="noStrike">
@@ -19235,7 +18362,7 @@
                 <a:cs typeface="Noto Sans KR"/>
                 <a:sym typeface="Noto Sans KR"/>
               </a:rPr>
-              <a:t>   KcELECTRA-base</a:t>
+              <a:t xml:space="preserve">   KcELECTRA-base</a:t>
             </a:r>
             <a:endParaRPr/>
           </a:p>
@@ -19461,12 +18588,12 @@
             <a:br>
               <a:rPr b="0" i="0" lang="en-US" sz="1300" u="none" cap="none" strike="noStrike">
                 <a:solidFill>
-                  <a:schemeClr val="lt1"/>
-                </a:solidFill>
-                <a:latin typeface="Calibri"/>
-                <a:ea typeface="Calibri"/>
-                <a:cs typeface="Calibri"/>
-                <a:sym typeface="Calibri"/>
+                  <a:srgbClr val="000000"/>
+                </a:solidFill>
+                <a:latin typeface="Noto Sans KR"/>
+                <a:ea typeface="Noto Sans KR"/>
+                <a:cs typeface="Noto Sans KR"/>
+                <a:sym typeface="Noto Sans KR"/>
               </a:rPr>
             </a:br>
             <a:r>
@@ -19479,7 +18606,7 @@
                 <a:cs typeface="Noto Sans KR"/>
                 <a:sym typeface="Noto Sans KR"/>
               </a:rPr>
-              <a:t>파라미터 2.6배, 학습과 추론은 3배 느림</a:t>
+              <a:t>파라미터 2.6배, 학습과 추론은 약 3.2배 느림</a:t>
             </a:r>
             <a:endParaRPr/>
           </a:p>
@@ -22080,7 +21207,7 @@
                 <a:cs typeface="Noto Sans KR"/>
                 <a:sym typeface="Noto Sans KR"/>
               </a:rPr>
-              <a:t>→ </a:t>
+              <a:t>→</a:t>
             </a:r>
             <a:r>
               <a:rPr b="1" i="0" lang="en-US" sz="1500" u="none" cap="none" strike="noStrike">
@@ -22092,7 +21219,7 @@
                 <a:cs typeface="Noto Sans KR"/>
                 <a:sym typeface="Noto Sans KR"/>
               </a:rPr>
-              <a:t>대가: 사람 검토 12% → 33% · 12건 처리 11초 → 16~23초 · GPU 5.1GB → 7.7GB(8GB 중)</a:t>
+              <a:t xml:space="preserve"> 대가: 사람 검토 12.5% → 33% · 12건 처리 약 11초 → 16~23초 · GPU 5.1~5.3 → 7.6~7.8GB(8GB 중)</a:t>
             </a:r>
             <a:endParaRPr/>
           </a:p>
@@ -23289,7 +22416,7 @@
                 <a:cs typeface="Noto Sans KR"/>
                 <a:sym typeface="Noto Sans KR"/>
               </a:rPr>
-              <a:t>+1,000자 5건: 모두 '처리 실패'(원문을 돌려주다</a:t>
+              <a:t>+1,000자 5건: 모두 '처리 실패'(원문을 그대로</a:t>
             </a:r>
             <a:br>
               <a:rPr b="0" i="0" lang="en-US" sz="1300" u="none" cap="none" strike="noStrike">
@@ -23312,7 +22439,7 @@
                 <a:cs typeface="Noto Sans KR"/>
                 <a:sym typeface="Noto Sans KR"/>
               </a:rPr>
-              <a:t>출력 한도 512토큰을 넘김)</a:t>
+              <a:t>옮기다 출력 한도 512토큰에서 잘림)</a:t>
             </a:r>
             <a:endParaRPr/>
           </a:p>

--- a/artifacts/step_by_step/comments/bench01/demo/bench01_comments_slides_심플_피드백반영.pptx
+++ b/artifacts/step_by_step/comments/bench01/demo/bench01_comments_slides_심플_피드백반영.pptx
@@ -964,7 +964,7 @@
           <a:lstStyle/>
           <a:p>
             <a:r>
-              <a:t>(25초) 점수만 보지 않고 확인해서 판단을 바꾼 것을 모았습니다. 원본 dev가 train과 같은 기사여서 다시 나눴고, 사람이 채점을 읽다가 상관없는 답도 점수를 받는 구멍을 찾아 규칙을 고쳤고, 놓친 답의 원인을 세어 보고 계획을 바꿨고, 지침 문구가 오히려 원문을 고치게 해서 되돌렸습니다. 마지막으로 긴 댓글을 직접 넣어 보고 한계를 찾았습니다.</a:t>
+              <a:t>(30초) 점수만 보지 않고 확인해서 판단을 바꾼 것을 모았습니다. 원본 dev가 train과 같은 기사여서 다시 나눴고, 사람이 채점을 읽다가 상관없는 답도 점수를 받는 구멍을 찾아 규칙을 고쳤고, 놓친 답의 원인을 세어 보고 계획을 바꿨고, 지침 문구가 오히려 원문을 고치게 해서 되돌렸습니다. 긴 댓글을 직접 넣어 보고 한계를 찾았고, 마지막으로 시연 화면에서 다시 쓰라는 안내가 고친 댓글처럼 검사되는 것을 보고 사람 검토로 보내게 바꿨습니다.</a:t>
             </a:r>
           </a:p>
         </p:txBody>
@@ -12150,7 +12150,7 @@
         </p:nvGraphicFramePr>
         <p:xfrm>
           <a:off x="548640" y="1554480"/>
-          <a:ext cx="11091672" cy="3529584"/>
+          <a:ext cx="11091672" cy="3639312"/>
         </p:xfrm>
         <a:graphic>
           <a:graphicData uri="http://schemas.openxmlformats.org/drawingml/2006/table">
@@ -12164,7 +12164,7 @@
                 <a:gridCol w="5166360"/>
                 <a:gridCol w="4325112"/>
               </a:tblGrid>
-              <a:tr h="402336">
+              <a:tr h="365760">
                 <a:tc>
                   <a:txBody>
                     <a:bodyPr/>
@@ -12316,7 +12316,7 @@
                   </a:tcPr>
                 </a:tc>
               </a:tr>
-              <a:tr h="585216">
+              <a:tr h="512064">
                 <a:tc>
                   <a:txBody>
                     <a:bodyPr/>
@@ -12462,7 +12462,7 @@
                   </a:tcPr>
                 </a:tc>
               </a:tr>
-              <a:tr h="585216">
+              <a:tr h="512064">
                 <a:tc>
                   <a:txBody>
                     <a:bodyPr/>
@@ -12631,7 +12631,7 @@
                   </a:tcPr>
                 </a:tc>
               </a:tr>
-              <a:tr h="585216">
+              <a:tr h="512064">
                 <a:tc>
                   <a:txBody>
                     <a:bodyPr/>
@@ -12800,7 +12800,7 @@
                   </a:tcPr>
                 </a:tc>
               </a:tr>
-              <a:tr h="786384">
+              <a:tr h="713232">
                 <a:tc>
                   <a:txBody>
                     <a:bodyPr/>
@@ -12957,7 +12957,7 @@
                   </a:tcPr>
                 </a:tc>
               </a:tr>
-              <a:tr h="585216">
+              <a:tr h="512064">
                 <a:tc>
                   <a:txBody>
                     <a:bodyPr/>
@@ -12991,7 +12991,7 @@
                     </a:p>
                   </a:txBody>
                   <a:tcPr marT="36575" marB="36575" marR="109725" marL="109725" anchor="ctr">
-                    <a:lnB w="19050" cap="flat" cmpd="sng">
+                    <a:lnB w="6350" cap="flat" cmpd="sng">
                       <a:solidFill>
                         <a:srgbClr val="000000"/>
                       </a:solidFill>
@@ -13058,7 +13058,7 @@
                     </a:p>
                   </a:txBody>
                   <a:tcPr marT="36575" marB="36575" marR="109725" marL="109725" anchor="ctr">
-                    <a:lnB w="19050" cap="flat" cmpd="sng">
+                    <a:lnB w="6350" cap="flat" cmpd="sng">
                       <a:solidFill>
                         <a:srgbClr val="000000"/>
                       </a:solidFill>
@@ -13114,6 +13114,175 @@
                     </a:p>
                   </a:txBody>
                   <a:tcPr marT="36575" marB="36575" marR="109725" marL="109725" anchor="ctr">
+                    <a:lnB w="6350" cap="flat" cmpd="sng">
+                      <a:solidFill>
+                        <a:srgbClr val="000000"/>
+                      </a:solidFill>
+                      <a:prstDash val="solid"/>
+                    </a:lnB>
+                    <a:solidFill>
+                      <a:srgbClr val="FFFFFF"/>
+                    </a:solidFill>
+                  </a:tcPr>
+                </a:tc>
+              </a:tr>
+              <a:tr h="512064">
+                <a:tc>
+                  <a:txBody>
+                    <a:bodyPr/>
+                    <a:lstStyle/>
+                    <a:p>
+                      <a:pPr indent="0" lvl="0" marL="0" marR="0" rtl="0" algn="l">
+                        <a:lnSpc>
+                          <a:spcPct val="105000"/>
+                        </a:lnSpc>
+                        <a:spcBef>
+                          <a:spcPts val="0"/>
+                        </a:spcBef>
+                        <a:spcAft>
+                          <a:spcPts val="0"/>
+                        </a:spcAft>
+                        <a:buNone/>
+                      </a:pPr>
+                      <a:r>
+                        <a:rPr b="1" lang="en-US" sz="1300" u="none" cap="none" strike="noStrike">
+                          <a:solidFill>
+                            <a:srgbClr val="000000"/>
+                          </a:solidFill>
+                          <a:latin typeface="Noto Sans KR"/>
+                          <a:ea typeface="Noto Sans KR"/>
+                          <a:cs typeface="Noto Sans KR"/>
+                          <a:sym typeface="Noto Sans KR"/>
+                        </a:rPr>
+                        <a:t>시연 화면</a:t>
+                      </a:r>
+                      <a:endParaRPr/>
+                    </a:p>
+                  </a:txBody>
+                  <a:tcPr marT="36575" marB="36575" marR="109725" marL="109725" anchor="ctr">
+                    <a:lnB w="19050" cap="flat" cmpd="sng">
+                      <a:solidFill>
+                        <a:srgbClr val="000000"/>
+                      </a:solidFill>
+                      <a:prstDash val="solid"/>
+                    </a:lnB>
+                    <a:solidFill>
+                      <a:srgbClr val="FFFFFF"/>
+                    </a:solidFill>
+                  </a:tcPr>
+                </a:tc>
+                <a:tc>
+                  <a:txBody>
+                    <a:bodyPr/>
+                    <a:lstStyle/>
+                    <a:p>
+                      <a:pPr indent="0" lvl="0" marL="0" marR="0" rtl="0" algn="l">
+                        <a:lnSpc>
+                          <a:spcPct val="105000"/>
+                        </a:lnSpc>
+                        <a:spcBef>
+                          <a:spcPts val="0"/>
+                        </a:spcBef>
+                        <a:spcAft>
+                          <a:spcPts val="0"/>
+                        </a:spcAft>
+                        <a:buNone/>
+                      </a:pPr>
+                      <a:r>
+                        <a:rPr b="0" lang="en-US" sz="1300" u="none" cap="none" strike="noStrike">
+                          <a:solidFill>
+                            <a:srgbClr val="000000"/>
+                          </a:solidFill>
+                          <a:latin typeface="Noto Sans KR"/>
+                          <a:ea typeface="Noto Sans KR"/>
+                          <a:cs typeface="Noto Sans KR"/>
+                          <a:sym typeface="Noto Sans KR"/>
+                        </a:rPr>
+                        <a:t>다시 쓰라는 안내를 붙인 답도 고친 댓글로 보고 검사했습니다</a:t>
+                      </a:r>
+                      <a:br>
+                        <a:rPr b="0" lang="en-US" sz="1300" u="none" cap="none" strike="noStrike">
+                          <a:solidFill>
+                            <a:srgbClr val="000000"/>
+                          </a:solidFill>
+                          <a:latin typeface="Noto Sans KR"/>
+                          <a:ea typeface="Noto Sans KR"/>
+                          <a:cs typeface="Noto Sans KR"/>
+                          <a:sym typeface="Noto Sans KR"/>
+                        </a:rPr>
+                      </a:br>
+                      <a:r>
+                        <a:rPr b="0" lang="en-US" sz="1300" u="none" cap="none" strike="noStrike">
+                          <a:solidFill>
+                            <a:srgbClr val="000000"/>
+                          </a:solidFill>
+                          <a:latin typeface="Noto Sans KR"/>
+                          <a:ea typeface="Noto Sans KR"/>
+                          <a:cs typeface="Noto Sans KR"/>
+                          <a:sym typeface="Noto Sans KR"/>
+                        </a:rPr>
+                        <a:t>(로컬 답 78개 중 2개)</a:t>
+                      </a:r>
+                      <a:endParaRPr/>
+                    </a:p>
+                  </a:txBody>
+                  <a:tcPr marT="36575" marB="36575" marR="109725" marL="109725" anchor="ctr">
+                    <a:lnB w="19050" cap="flat" cmpd="sng">
+                      <a:solidFill>
+                        <a:srgbClr val="000000"/>
+                      </a:solidFill>
+                      <a:prstDash val="solid"/>
+                    </a:lnB>
+                    <a:solidFill>
+                      <a:srgbClr val="FFFFFF"/>
+                    </a:solidFill>
+                  </a:tcPr>
+                </a:tc>
+                <a:tc>
+                  <a:txBody>
+                    <a:bodyPr/>
+                    <a:lstStyle/>
+                    <a:p>
+                      <a:pPr indent="0" lvl="0" marL="0" marR="0" rtl="0" algn="l">
+                        <a:lnSpc>
+                          <a:spcPct val="105000"/>
+                        </a:lnSpc>
+                        <a:spcBef>
+                          <a:spcPts val="0"/>
+                        </a:spcBef>
+                        <a:spcAft>
+                          <a:spcPts val="0"/>
+                        </a:spcAft>
+                        <a:buNone/>
+                      </a:pPr>
+                      <a:r>
+                        <a:rPr b="1" lang="en-US" sz="1300" u="none" cap="none" strike="noStrike">
+                          <a:solidFill>
+                            <a:srgbClr val="3451D1"/>
+                          </a:solidFill>
+                          <a:latin typeface="Noto Sans KR"/>
+                          <a:ea typeface="Noto Sans KR"/>
+                          <a:cs typeface="Noto Sans KR"/>
+                          <a:sym typeface="Noto Sans KR"/>
+                        </a:rPr>
+                        <a:t>사람 검토로 보냄</a:t>
+                      </a:r>
+                      <a:r>
+                        <a:rPr b="0" lang="en-US" sz="1300" u="none" cap="none" strike="noStrike">
+                          <a:solidFill>
+                            <a:srgbClr val="000000"/>
+                          </a:solidFill>
+                          <a:latin typeface="Noto Sans KR"/>
+                          <a:ea typeface="Noto Sans KR"/>
+                          <a:cs typeface="Noto Sans KR"/>
+                          <a:sym typeface="Noto Sans KR"/>
+                        </a:rPr>
+                        <a:t xml:space="preserve"> (1개는 제대로 고친 댓글이라 막지 않음)</a:t>
+                      </a:r>
+                      <a:endParaRPr/>
+                    </a:p>
+                  </a:txBody>
+                  <a:tcPr marT="36575" marB="36575" marR="109725" marL="109725" anchor="ctr">
                     <a:lnB w="19050" cap="flat" cmpd="sng">
                       <a:solidFill>
                         <a:srgbClr val="000000"/>
@@ -13138,8 +13307,8 @@
         </p:nvSpPr>
         <p:spPr>
           <a:xfrm>
-            <a:off x="548640" y="5212080"/>
-            <a:ext cx="11094415" cy="411480"/>
+            <a:off x="548640" y="5303520"/>
+            <a:ext cx="11094415" cy="365760"/>
           </a:xfrm>
           <a:prstGeom prst="rect">
             <a:avLst/>
@@ -13177,7 +13346,7 @@
                 <a:cs typeface="Noto Sans KR"/>
                 <a:sym typeface="Noto Sans KR"/>
               </a:rPr>
-              <a:t>확인한 방법: 채점은 사람이 직접 읽었고, 분할·원인·긴 댓글은 수를 세거나 직접 넣어 봤습니다. 근거는 실험 폴더마다 README에 있습니다.</a:t>
+              <a:t>확인한 방법: 채점은 사람이 직접 읽었고, 분할·원인·긴 댓글·시연 화면은 수를 세거나 직접 넣어 봤습니다. 근거는 실험 폴더마다 README에 있습니다.</a:t>
             </a:r>
             <a:endParaRPr/>
           </a:p>
@@ -13191,7 +13360,7 @@
         </p:nvSpPr>
         <p:spPr>
           <a:xfrm>
-            <a:off x="548640" y="5742432"/>
+            <a:off x="548640" y="5760720"/>
             <a:ext cx="11094415" cy="530352"/>
           </a:xfrm>
           <a:prstGeom prst="rect">
